--- a/Topic_A/Exam_Practice/AT-A-L11_Writing_Workshop_Reading_Travel_and_Tourism_Texts.pptx
+++ b/Topic_A/Exam_Practice/AT-A-L11_Writing_Workshop_Reading_Travel_and_Tourism_Texts.pptx
@@ -784,7 +784,11 @@
           <a:lstStyle/>
           <a:p>
             <a:r>
-              <a:rPr lang="en-US" dirty="0"/>
+              <a:rPr lang="ar-SA" dirty="0">
+                <a:latin typeface="Amiri" pitchFamily="2" charset="-78"/>
+                <a:ea typeface="Amiri" pitchFamily="2" charset="-78"/>
+                <a:cs typeface="Amiri" pitchFamily="2" charset="-78"/>
+              </a:rPr>
               <a:t>Q3 (3 min to choose and read). Title (أ) suits Core and Develop; title (ب) suits Stretch.</a:t>
             </a:r>
             <a:endParaRPr lang="en-US" dirty="0"/>
@@ -1403,7 +1407,11 @@
           <a:lstStyle/>
           <a:p>
             <a:r>
-              <a:rPr lang="en-US" dirty="0"/>
+              <a:rPr lang="ar-SA" dirty="0">
+                <a:latin typeface="Amiri" pitchFamily="2" charset="-78"/>
+                <a:ea typeface="Amiri" pitchFamily="2" charset="-78"/>
+                <a:cs typeface="Amiri" pitchFamily="2" charset="-78"/>
+              </a:rPr>
               <a:t>WELCOME (1 min) — while students join.
 • Greet each student by name as they arrive: السَّلَامُ عَلَيْكُمْ. Take the register (Pastoral Tracker: attendance 0/1).
 • 2-MINUTE CHECK-IN (SEND training): a private chat to any student who seemed unsettled last lesson — “Are you okay today? 👍 / 👎”.
@@ -1936,7 +1944,11 @@
           <a:lstStyle/>
           <a:p>
             <a:r>
-              <a:rPr lang="en-US" dirty="0"/>
+              <a:rPr lang="ar-SA" dirty="0">
+                <a:latin typeface="Amiri" pitchFamily="2" charset="-78"/>
+                <a:ea typeface="Amiri" pitchFamily="2" charset="-78"/>
+                <a:cs typeface="Amiri" pitchFamily="2" charset="-78"/>
+              </a:rPr>
               <a:t>Question words: أَيْنَ (where) · كَيْفَ (how / what like) · مَاذَا (what) · مَا خُطَطُكِ (your plans) — bullet 3 is PAST, bullet 4 is FUTURE.</a:t>
             </a:r>
             <a:endParaRPr lang="en-US" dirty="0"/>
@@ -2508,6 +2520,7 @@
                   <a:srgbClr val="D4AF37"/>
                 </a:solidFill>
                 <a:latin typeface="Amiri" pitchFamily="2" charset="-78"/>
+                <a:ea typeface="Amiri" pitchFamily="2" charset="-78"/>
                 <a:cs typeface="Amiri" pitchFamily="2" charset="-78"/>
               </a:rPr>
               <a:t>م</a:t>
@@ -2714,6 +2727,7 @@
                   <a:srgbClr val="D4AF37"/>
                 </a:solidFill>
                 <a:latin typeface="Amiri" pitchFamily="2" charset="-78"/>
+                <a:ea typeface="Amiri" pitchFamily="2" charset="-78"/>
                 <a:cs typeface="Amiri" pitchFamily="2" charset="-78"/>
               </a:rPr>
               <a:t>وَرْشَةُ الكِتَابَةِ — السَّفَرُ وَالسِّيَاحَةُ</a:t>
@@ -3171,6 +3185,7 @@
                   <a:srgbClr val="D4AF37"/>
                 </a:solidFill>
                 <a:latin typeface="Amiri" pitchFamily="2" charset="-78"/>
+                <a:ea typeface="Amiri" pitchFamily="2" charset="-78"/>
                 <a:cs typeface="Amiri" pitchFamily="2" charset="-78"/>
               </a:rPr>
               <a:t>م</a:t>
@@ -3491,6 +3506,7 @@
                   <a:srgbClr val="8A6D1E"/>
                 </a:solidFill>
                 <a:latin typeface="Amiri" pitchFamily="2" charset="-78"/>
+                <a:ea typeface="Amiri" pitchFamily="2" charset="-78"/>
                 <a:cs typeface="Amiri" pitchFamily="2" charset="-78"/>
               </a:rPr>
               <a:t>نَمُوذَجُ الإِجَابَةِ</a:t>
@@ -3604,6 +3620,7 @@
                   <a:srgbClr val="1F2A37"/>
                 </a:solidFill>
                 <a:latin typeface="Amiri" pitchFamily="2" charset="-78"/>
+                <a:ea typeface="Amiri" pitchFamily="2" charset="-78"/>
                 <a:cs typeface="Amiri" pitchFamily="2" charset="-78"/>
               </a:rPr>
               <a:t>مَرْحَبًا يَا نَادِيَةُ،</a:t>
@@ -3623,6 +3640,7 @@
                   <a:srgbClr val="1F2A37"/>
                 </a:solidFill>
                 <a:latin typeface="Amiri" pitchFamily="2" charset="-78"/>
+                <a:ea typeface="Amiri" pitchFamily="2" charset="-78"/>
                 <a:cs typeface="Amiri" pitchFamily="2" charset="-78"/>
               </a:rPr>
               <a:t>كَيْفَ حَالُكِ؟ أَنَا الآنَ فِي تُونِسَ مَعَ أُسْرَتِي. سَافَرْنَا بِالطَّائِرَةِ يَوْمَ السَّبْتِ، وَاسْتَغْرَقَتِ الرِّحْلَةُ ثَلَاثَ سَاعَاتٍ. نَزَلْنَا فِي فُنْدُقٍ جَمِيلٍ قَرِيبٍ مِنَ البَحْرِ، وَغُرْفَتِي كَبِيرَةٌ وَنَظِيفَةٌ. أَمْسِ زُرْنَا المَدِينَةَ القَدِيمَةَ، وَاشْتَرَيْتُ هَدِيَّةً لَكِ مِنَ السُّوقِ، وَأَكَلْنَا الحَلَوِيَّاتِ التُّونِسِيَّةَ. الطَّقْسُ حَارٌّ، لٰكِنَّ البَحْرَ رَائِعٌ. غَدًا سَنَزُورُ قَرْطَاجَ، وَسَنَأْكُلُ الكُسْكُسِي فِي مَطْعَمٍ مَشْهُورٍ.</a:t>
@@ -3642,6 +3660,7 @@
                   <a:srgbClr val="1F2A37"/>
                 </a:solidFill>
                 <a:latin typeface="Amiri" pitchFamily="2" charset="-78"/>
+                <a:ea typeface="Amiri" pitchFamily="2" charset="-78"/>
                 <a:cs typeface="Amiri" pitchFamily="2" charset="-78"/>
               </a:rPr>
               <a:t>مَعَ السَّلَامَةِ،</a:t>
@@ -3661,6 +3680,7 @@
                   <a:srgbClr val="1F2A37"/>
                 </a:solidFill>
                 <a:latin typeface="Amiri" pitchFamily="2" charset="-78"/>
+                <a:ea typeface="Amiri" pitchFamily="2" charset="-78"/>
                 <a:cs typeface="Amiri" pitchFamily="2" charset="-78"/>
               </a:rPr>
               <a:t>رِيمُ</a:t>
@@ -3824,11 +3844,12 @@
               <a:buNone/>
             </a:pPr>
             <a:r>
-              <a:rPr lang="en-US" sz="950" b="1" dirty="0">
+              <a:rPr lang="ar-SA" sz="950" b="1" dirty="0">
                 <a:solidFill>
                   <a:srgbClr val="FFFFFF"/>
                 </a:solidFill>
                 <a:latin typeface="Calibri" pitchFamily="34" charset="0"/>
+                <a:ea typeface="Amiri" pitchFamily="2" charset="-78"/>
                 <a:cs typeface="Amiri" pitchFamily="2" charset="-78"/>
               </a:rPr>
               <a:t>سَافَرْنَا بِالطَّائِرَةِ</a:t>
@@ -3889,11 +3910,12 @@
               <a:buNone/>
             </a:pPr>
             <a:r>
-              <a:rPr lang="en-US" sz="950" b="1" dirty="0">
+              <a:rPr lang="ar-SA" sz="950" b="1" dirty="0">
                 <a:solidFill>
                   <a:srgbClr val="FFFFFF"/>
                 </a:solidFill>
                 <a:latin typeface="Calibri" pitchFamily="34" charset="0"/>
+                <a:ea typeface="Amiri" pitchFamily="2" charset="-78"/>
                 <a:cs typeface="Amiri" pitchFamily="2" charset="-78"/>
               </a:rPr>
               <a:t>نَزَلْنَا فِي فُنْدُقٍ</a:t>
@@ -3954,11 +3976,12 @@
               <a:buNone/>
             </a:pPr>
             <a:r>
-              <a:rPr lang="en-US" sz="950" b="1" dirty="0">
+              <a:rPr lang="ar-SA" sz="950" b="1" dirty="0">
                 <a:solidFill>
                   <a:srgbClr val="FFFFFF"/>
                 </a:solidFill>
                 <a:latin typeface="Calibri" pitchFamily="34" charset="0"/>
+                <a:ea typeface="Amiri" pitchFamily="2" charset="-78"/>
                 <a:cs typeface="Amiri" pitchFamily="2" charset="-78"/>
               </a:rPr>
               <a:t>أَمْسِ زُرْنَا</a:t>
@@ -4019,11 +4042,12 @@
               <a:buNone/>
             </a:pPr>
             <a:r>
-              <a:rPr lang="en-US" sz="950" b="1" dirty="0">
+              <a:rPr lang="ar-SA" sz="950" b="1" dirty="0">
                 <a:solidFill>
                   <a:srgbClr val="FFFFFF"/>
                 </a:solidFill>
                 <a:latin typeface="Calibri" pitchFamily="34" charset="0"/>
+                <a:ea typeface="Amiri" pitchFamily="2" charset="-78"/>
                 <a:cs typeface="Amiri" pitchFamily="2" charset="-78"/>
               </a:rPr>
               <a:t>غَدًا سَنَزُورُ</a:t>
@@ -4157,6 +4181,7 @@
                   <a:srgbClr val="D4AF37"/>
                 </a:solidFill>
                 <a:latin typeface="Amiri" pitchFamily="2" charset="-78"/>
+                <a:ea typeface="Amiri" pitchFamily="2" charset="-78"/>
                 <a:cs typeface="Amiri" pitchFamily="2" charset="-78"/>
               </a:rPr>
               <a:t>م</a:t>
@@ -4477,6 +4502,7 @@
                   <a:srgbClr val="8A6D1E"/>
                 </a:solidFill>
                 <a:latin typeface="Amiri" pitchFamily="2" charset="-78"/>
+                <a:ea typeface="Amiri" pitchFamily="2" charset="-78"/>
                 <a:cs typeface="Amiri" pitchFamily="2" charset="-78"/>
               </a:rPr>
               <a:t>نَمُوذَجُ الإِجَابَةِ</a:t>
@@ -4590,6 +4616,7 @@
                   <a:srgbClr val="1F2A37"/>
                 </a:solidFill>
                 <a:latin typeface="Amiri" pitchFamily="2" charset="-78"/>
+                <a:ea typeface="Amiri" pitchFamily="2" charset="-78"/>
                 <a:cs typeface="Amiri" pitchFamily="2" charset="-78"/>
               </a:rPr>
               <a:t>عَزِيزَتِي نَادِيَةُ،</a:t>
@@ -4609,6 +4636,7 @@
                   <a:srgbClr val="1F2A37"/>
                 </a:solidFill>
                 <a:latin typeface="Amiri" pitchFamily="2" charset="-78"/>
+                <a:ea typeface="Amiri" pitchFamily="2" charset="-78"/>
                 <a:cs typeface="Amiri" pitchFamily="2" charset="-78"/>
               </a:rPr>
               <a:t>تَحِيَّةً طَيِّبَةً مِنْ تُونِسَ! وَصَلْنَا يَوْمَ السَّبْتِ بَعْدَ رِحْلَةٍ بِالطَّائِرَةِ اسْتَغْرَقَتْ ثَلَاثَ سَاعَاتٍ، وَنَزَلْنَا فِي فُنْدُقٍ صَغِيرٍ لٰكِنَّهُ مُرِيحٌ، تُطِلُّ غُرْفَتِي فِيهِ عَلَى البَحْرِ مُبَاشَرَةً. أَمْسِ قَضَيْنَا اليَوْمَ فِي المَدِينَةِ القَدِيمَةِ، وَتَجَوَّلْنَا فِي أَسْوَاقِهَا الضَّيِّقَةِ، وَاشْتَرَيْتُ لَكِ هَدِيَّةً سَتُحِبِّينَهَا، ثُمَّ جَلَسْنَا فِي مَقْهًى قَدِيمٍ وَشَرِبْنَا الشَّايَ بِالبُنْدُقِ. صَحِيحٌ أَنَّ الطَّقْسَ حَارٌّ جِدًّا فِي الظُّهْرِ، غَيْرَ أَنَّ النَّسِيمَ فِي المَسَاءِ لَطِيفٌ. غَدًا سَنَزُورُ آثَارَ قَرْطَاجَ، وَإِذَا بَقِيَ عِنْدَنَا وَقْتٌ، سَنَذْهَبُ إِلَى سِيدِي بُوسَعِيدَ. لَوْ كُنْتِ مَعَنَا، لَكَانَتِ الرِّحْلَةُ أَجْمَلَ!</a:t>
@@ -4628,6 +4656,7 @@
                   <a:srgbClr val="1F2A37"/>
                 </a:solidFill>
                 <a:latin typeface="Amiri" pitchFamily="2" charset="-78"/>
+                <a:ea typeface="Amiri" pitchFamily="2" charset="-78"/>
                 <a:cs typeface="Amiri" pitchFamily="2" charset="-78"/>
               </a:rPr>
               <a:t>مَعَ أَشْوَاقِي،</a:t>
@@ -4647,6 +4676,7 @@
                   <a:srgbClr val="1F2A37"/>
                 </a:solidFill>
                 <a:latin typeface="Amiri" pitchFamily="2" charset="-78"/>
+                <a:ea typeface="Amiri" pitchFamily="2" charset="-78"/>
                 <a:cs typeface="Amiri" pitchFamily="2" charset="-78"/>
               </a:rPr>
               <a:t>رِيمُ</a:t>
@@ -4810,11 +4840,12 @@
               <a:buNone/>
             </a:pPr>
             <a:r>
-              <a:rPr lang="en-US" sz="950" b="1" dirty="0">
+              <a:rPr lang="ar-SA" sz="950" b="1" dirty="0">
                 <a:solidFill>
                   <a:srgbClr val="FFFFFF"/>
                 </a:solidFill>
                 <a:latin typeface="Calibri" pitchFamily="34" charset="0"/>
+                <a:ea typeface="Amiri" pitchFamily="2" charset="-78"/>
                 <a:cs typeface="Amiri" pitchFamily="2" charset="-78"/>
               </a:rPr>
               <a:t>تُطِلُّ غُرْفَتِي فِيهِ</a:t>
@@ -4875,11 +4906,12 @@
               <a:buNone/>
             </a:pPr>
             <a:r>
-              <a:rPr lang="en-US" sz="950" b="1" dirty="0">
+              <a:rPr lang="ar-SA" sz="950" b="1" dirty="0">
                 <a:solidFill>
                   <a:srgbClr val="FFFFFF"/>
                 </a:solidFill>
                 <a:latin typeface="Calibri" pitchFamily="34" charset="0"/>
+                <a:ea typeface="Amiri" pitchFamily="2" charset="-78"/>
                 <a:cs typeface="Amiri" pitchFamily="2" charset="-78"/>
               </a:rPr>
               <a:t>سَتُحِبِّينَهَا</a:t>
@@ -4940,11 +4972,12 @@
               <a:buNone/>
             </a:pPr>
             <a:r>
-              <a:rPr lang="en-US" sz="950" b="1" dirty="0">
+              <a:rPr lang="ar-SA" sz="950" b="1" dirty="0">
                 <a:solidFill>
                   <a:srgbClr val="FFFFFF"/>
                 </a:solidFill>
                 <a:latin typeface="Calibri" pitchFamily="34" charset="0"/>
+                <a:ea typeface="Amiri" pitchFamily="2" charset="-78"/>
                 <a:cs typeface="Amiri" pitchFamily="2" charset="-78"/>
               </a:rPr>
               <a:t>إِذَا بَقِيَ … سَنَذْهَبُ</a:t>
@@ -5005,11 +5038,12 @@
               <a:buNone/>
             </a:pPr>
             <a:r>
-              <a:rPr lang="en-US" sz="950" b="1" dirty="0">
+              <a:rPr lang="ar-SA" sz="950" b="1" dirty="0">
                 <a:solidFill>
                   <a:srgbClr val="FFFFFF"/>
                 </a:solidFill>
                 <a:latin typeface="Calibri" pitchFamily="34" charset="0"/>
+                <a:ea typeface="Amiri" pitchFamily="2" charset="-78"/>
                 <a:cs typeface="Amiri" pitchFamily="2" charset="-78"/>
               </a:rPr>
               <a:t>لَوْ كُنْتِ … لَكَانَتِ</a:t>
@@ -5143,6 +5177,7 @@
                   <a:srgbClr val="D4AF37"/>
                 </a:solidFill>
                 <a:latin typeface="Amiri" pitchFamily="2" charset="-78"/>
+                <a:ea typeface="Amiri" pitchFamily="2" charset="-78"/>
                 <a:cs typeface="Amiri" pitchFamily="2" charset="-78"/>
               </a:rPr>
               <a:t>م</a:t>
@@ -5463,6 +5498,7 @@
                   <a:srgbClr val="8A6D1E"/>
                 </a:solidFill>
                 <a:latin typeface="Amiri" pitchFamily="2" charset="-78"/>
+                <a:ea typeface="Amiri" pitchFamily="2" charset="-78"/>
                 <a:cs typeface="Amiri" pitchFamily="2" charset="-78"/>
               </a:rPr>
               <a:t>اخْتَرْ عُنْوَانًا وَاحِدًا</a:t>
@@ -5743,6 +5779,7 @@
                   <a:srgbClr val="1B3B6F"/>
                 </a:solidFill>
                 <a:latin typeface="Amiri" pitchFamily="2" charset="-78"/>
+                <a:ea typeface="Amiri" pitchFamily="2" charset="-78"/>
                 <a:cs typeface="Amiri" pitchFamily="2" charset="-78"/>
               </a:rPr>
               <a:t>رِحْلَةٌ لَا أَنْسَاهَا</a:t>
@@ -5781,6 +5818,7 @@
                   <a:srgbClr val="1B3B6F"/>
                 </a:solidFill>
                 <a:latin typeface="Amiri" pitchFamily="2" charset="-78"/>
+                <a:ea typeface="Amiri" pitchFamily="2" charset="-78"/>
                 <a:cs typeface="Amiri" pitchFamily="2" charset="-78"/>
               </a:rPr>
               <a:t>(أ)</a:t>
@@ -5887,6 +5925,7 @@
                   <a:srgbClr val="1B3B6F"/>
                 </a:solidFill>
                 <a:latin typeface="Amiri" pitchFamily="2" charset="-78"/>
+                <a:ea typeface="Amiri" pitchFamily="2" charset="-78"/>
                 <a:cs typeface="Amiri" pitchFamily="2" charset="-78"/>
               </a:rPr>
               <a:t>أَيْنَ وَكَيْفَ سَافَرْتَ؟ · أَيْنَ نَزَلْتَ؟ وَمَاذَا زُرْتَ؟ · مُشْكِلَةٌ أَوْ مَوْقِفٌ لَا تَنْسَاهُ · مَاذَا تَعَلَّمْتَ؟ وَأَيْنَ تُرِيدُ أَنْ تُسَافِرَ؟</a:t>
@@ -6018,6 +6057,7 @@
                   <a:srgbClr val="1B3B6F"/>
                 </a:solidFill>
                 <a:latin typeface="Amiri" pitchFamily="2" charset="-78"/>
+                <a:ea typeface="Amiri" pitchFamily="2" charset="-78"/>
                 <a:cs typeface="Amiri" pitchFamily="2" charset="-78"/>
               </a:rPr>
               <a:t>السِّيَاحَةُ: فَوَائِدُ وَأَضْرَارٌ</a:t>
@@ -6056,6 +6096,7 @@
                   <a:srgbClr val="1B3B6F"/>
                 </a:solidFill>
                 <a:latin typeface="Amiri" pitchFamily="2" charset="-78"/>
+                <a:ea typeface="Amiri" pitchFamily="2" charset="-78"/>
                 <a:cs typeface="Amiri" pitchFamily="2" charset="-78"/>
               </a:rPr>
               <a:t>(ب)</a:t>
@@ -6162,6 +6203,7 @@
                   <a:srgbClr val="1B3B6F"/>
                 </a:solidFill>
                 <a:latin typeface="Amiri" pitchFamily="2" charset="-78"/>
+                <a:ea typeface="Amiri" pitchFamily="2" charset="-78"/>
                 <a:cs typeface="Amiri" pitchFamily="2" charset="-78"/>
               </a:rPr>
               <a:t>فَوَائِدُ السِّيَاحَةِ · كَيْفَ تَغَيَّرَ السَّفَرُ؟ · تَجْرِبَةٌ لَاحَظْتَ فِيهَا مُشْكِلَةً · رَأْيُكَ وَاقْتِرَاحَاتُكَ</a:t>
@@ -6361,6 +6403,7 @@
                   <a:srgbClr val="D4AF37"/>
                 </a:solidFill>
                 <a:latin typeface="Amiri" pitchFamily="2" charset="-78"/>
+                <a:ea typeface="Amiri" pitchFamily="2" charset="-78"/>
                 <a:cs typeface="Amiri" pitchFamily="2" charset="-78"/>
               </a:rPr>
               <a:t>م</a:t>
@@ -6681,6 +6724,7 @@
                   <a:srgbClr val="8A6D1E"/>
                 </a:solidFill>
                 <a:latin typeface="Amiri" pitchFamily="2" charset="-78"/>
+                <a:ea typeface="Amiri" pitchFamily="2" charset="-78"/>
                 <a:cs typeface="Amiri" pitchFamily="2" charset="-78"/>
               </a:rPr>
               <a:t>خُطَّةُ الكِتَابَةِ</a:t>
@@ -7305,6 +7349,7 @@
                   <a:srgbClr val="1B3B6F"/>
                 </a:solidFill>
                 <a:latin typeface="Amiri" pitchFamily="2" charset="-78"/>
+                <a:ea typeface="Amiri" pitchFamily="2" charset="-78"/>
                 <a:cs typeface="Amiri" pitchFamily="2" charset="-78"/>
               </a:rPr>
               <a:t>نَزَلْنَا فِي فُنْدُقٍ قَرِيبٍ مِنَ البَحْرِ.</a:t>
@@ -7404,6 +7449,7 @@
                   <a:srgbClr val="1B3B6F"/>
                 </a:solidFill>
                 <a:latin typeface="Amiri" pitchFamily="2" charset="-78"/>
+                <a:ea typeface="Amiri" pitchFamily="2" charset="-78"/>
                 <a:cs typeface="Amiri" pitchFamily="2" charset="-78"/>
               </a:rPr>
               <a:t>المَغْرِبُ بَلَدٌ رَائِعٌ.</a:t>
@@ -7503,6 +7549,7 @@
                   <a:srgbClr val="1B3B6F"/>
                 </a:solidFill>
                 <a:latin typeface="Amiri" pitchFamily="2" charset="-78"/>
+                <a:ea typeface="Amiri" pitchFamily="2" charset="-78"/>
                 <a:cs typeface="Amiri" pitchFamily="2" charset="-78"/>
               </a:rPr>
               <a:t>إِذَا سَنَحَتِ الفُرْصَةُ، سَأَزُورُ فَاسَ.</a:t>
@@ -7664,6 +7711,7 @@
                   <a:srgbClr val="1F2A37"/>
                 </a:solidFill>
                 <a:latin typeface="Amiri" pitchFamily="2" charset="-78"/>
+                <a:ea typeface="Amiri" pitchFamily="2" charset="-78"/>
                 <a:cs typeface="Amiri" pitchFamily="2" charset="-78"/>
               </a:rPr>
               <a:t>أ</a:t>
@@ -7690,6 +7738,7 @@
                   <a:srgbClr val="1F2A37"/>
                 </a:solidFill>
                 <a:latin typeface="Amiri" pitchFamily="2" charset="-78"/>
+                <a:ea typeface="Amiri" pitchFamily="2" charset="-78"/>
                 <a:cs typeface="Amiri" pitchFamily="2" charset="-78"/>
               </a:rPr>
               <a:t>ب</a:t>
@@ -7836,6 +7885,7 @@
                   <a:srgbClr val="D4AF37"/>
                 </a:solidFill>
                 <a:latin typeface="Amiri" pitchFamily="2" charset="-78"/>
+                <a:ea typeface="Amiri" pitchFamily="2" charset="-78"/>
                 <a:cs typeface="Amiri" pitchFamily="2" charset="-78"/>
               </a:rPr>
               <a:t>م</a:t>
@@ -8093,6 +8143,7 @@
                   <a:srgbClr val="8A6D1E"/>
                 </a:solidFill>
                 <a:latin typeface="Amiri" pitchFamily="2" charset="-78"/>
+                <a:ea typeface="Amiri" pitchFamily="2" charset="-78"/>
                 <a:cs typeface="Amiri" pitchFamily="2" charset="-78"/>
               </a:rPr>
               <a:t>أ</a:t>
@@ -8157,6 +8208,7 @@
                   <a:srgbClr val="1B3B6F"/>
                 </a:solidFill>
                 <a:latin typeface="Amiri" pitchFamily="2" charset="-78"/>
+                <a:ea typeface="Amiri" pitchFamily="2" charset="-78"/>
                 <a:cs typeface="Amiri" pitchFamily="2" charset="-78"/>
               </a:rPr>
               <a:t>أ</a:t>
@@ -8208,6 +8260,7 @@
                   <a:srgbClr val="8A6D1E"/>
                 </a:solidFill>
                 <a:latin typeface="Amiri" pitchFamily="2" charset="-78"/>
+                <a:ea typeface="Amiri" pitchFamily="2" charset="-78"/>
                 <a:cs typeface="Amiri" pitchFamily="2" charset="-78"/>
               </a:rPr>
               <a:t>نَمُوذَجُ الإِجَابَةِ</a:t>
@@ -8321,6 +8374,7 @@
                   <a:srgbClr val="1F2A37"/>
                 </a:solidFill>
                 <a:latin typeface="Amiri" pitchFamily="2" charset="-78"/>
+                <a:ea typeface="Amiri" pitchFamily="2" charset="-78"/>
                 <a:cs typeface="Amiri" pitchFamily="2" charset="-78"/>
               </a:rPr>
               <a:t>فِي الصَّيْفِ المَاضِي سَافَرْتُ مَعَ أُسْرَتِي إِلَى المَغْرِبِ. سَافَرْنَا بِالطَّائِرَةِ مِنْ لَنْدَنَ إِلَى مُرَّاكُشَ، وَاسْتَغْرَقَتِ الرِّحْلَةُ أَرْبَعَ سَاعَاتٍ. نَزَلْنَا فِي فُنْدُقٍ تَقْلِيدِيٍّ جَمِيلٍ، فِيهِ حَدِيقَةٌ وَمَسْبَحٌ، وَكَانَتْ غُرْفَتِي جَمِيلَةً وَمُلَوَّنَةً.</a:t>
@@ -8340,6 +8394,7 @@
                   <a:srgbClr val="1F2A37"/>
                 </a:solidFill>
                 <a:latin typeface="Amiri" pitchFamily="2" charset="-78"/>
+                <a:ea typeface="Amiri" pitchFamily="2" charset="-78"/>
                 <a:cs typeface="Amiri" pitchFamily="2" charset="-78"/>
               </a:rPr>
               <a:t>فِي اليَوْمِ الأَوَّلِ زُرْنَا سَاحَةَ جَامِعِ الفَنَا. رَأَيْنَا هُنَاكَ مُوسِيقِيِّينَ وَبَائِعِينَ كَثِيرِينَ، وَاشْتَرَتْ أُمِّي سَجَّادَةً صَغِيرَةً. أَكَلْنَا الطَّاجِينَ، وَشَرِبْنَا الشَّايَ بِالنَّعْنَاعِ. كَانَ الأَكْلُ لَذِيذًا جِدًّا، وَكَانَ رَخِيصًا أَيْضًا، فَأَكَلْنَا كَثِيرًا!</a:t>
@@ -8359,6 +8414,7 @@
                   <a:srgbClr val="1F2A37"/>
                 </a:solidFill>
                 <a:latin typeface="Amiri" pitchFamily="2" charset="-78"/>
+                <a:ea typeface="Amiri" pitchFamily="2" charset="-78"/>
                 <a:cs typeface="Amiri" pitchFamily="2" charset="-78"/>
               </a:rPr>
               <a:t>فِي اليَوْمِ الثَّالِثِ ذَهَبْنَا إِلَى الصَّحْرَاءِ، وَرَكِبْنَا الجِمَالَ. كَانَ الجَوُّ حَارًّا جِدًّا، فَشَرِبْنَا مَاءً كَثِيرًا. فِي اللَّيْلِ نِمْنَا فِي خَيْمَةٍ، وَرَأَيْنَا نُجُومًا كَثِيرَةً. كَانَتْ أَجْمَلَ لَيْلَةٍ فِي الرِّحْلَةِ، وَأَخَذْتُ صُوَرًا كَثِيرَةً.</a:t>
@@ -8378,6 +8434,7 @@
                   <a:srgbClr val="1F2A37"/>
                 </a:solidFill>
                 <a:latin typeface="Amiri" pitchFamily="2" charset="-78"/>
+                <a:ea typeface="Amiri" pitchFamily="2" charset="-78"/>
                 <a:cs typeface="Amiri" pitchFamily="2" charset="-78"/>
               </a:rPr>
               <a:t>فِي رَأْيِي، المَغْرِبُ بَلَدٌ رَائِعٌ، لِأَنَّ النَّاسَ لُطَفَاءُ وَالأَكْلَ لَذِيذٌ. فِي المُسْتَقْبَلِ أُرِيدُ أَنْ أَزُورَ فَاسَ وَشَفْشَاوِنَ، لِأَنَّهُمَا مَدِينَتَانِ تَارِيخِيَّتَانِ.</a:t>
@@ -8541,11 +8598,12 @@
               <a:buNone/>
             </a:pPr>
             <a:r>
-              <a:rPr lang="en-US" sz="950" b="1" dirty="0">
+              <a:rPr lang="ar-SA" sz="950" b="1" dirty="0">
                 <a:solidFill>
                   <a:srgbClr val="FFFFFF"/>
                 </a:solidFill>
                 <a:latin typeface="Calibri" pitchFamily="34" charset="0"/>
+                <a:ea typeface="Amiri" pitchFamily="2" charset="-78"/>
                 <a:cs typeface="Amiri" pitchFamily="2" charset="-78"/>
               </a:rPr>
               <a:t>سَافَرْنَا بِالطَّائِرَةِ</a:t>
@@ -8606,11 +8664,12 @@
               <a:buNone/>
             </a:pPr>
             <a:r>
-              <a:rPr lang="en-US" sz="950" b="1" dirty="0">
+              <a:rPr lang="ar-SA" sz="950" b="1" dirty="0">
                 <a:solidFill>
                   <a:srgbClr val="FFFFFF"/>
                 </a:solidFill>
                 <a:latin typeface="Calibri" pitchFamily="34" charset="0"/>
+                <a:ea typeface="Amiri" pitchFamily="2" charset="-78"/>
                 <a:cs typeface="Amiri" pitchFamily="2" charset="-78"/>
               </a:rPr>
               <a:t>زُرْنَا سَاحَةَ</a:t>
@@ -8671,11 +8730,12 @@
               <a:buNone/>
             </a:pPr>
             <a:r>
-              <a:rPr lang="en-US" sz="950" b="1" dirty="0">
+              <a:rPr lang="ar-SA" sz="950" b="1" dirty="0">
                 <a:solidFill>
                   <a:srgbClr val="FFFFFF"/>
                 </a:solidFill>
                 <a:latin typeface="Calibri" pitchFamily="34" charset="0"/>
+                <a:ea typeface="Amiri" pitchFamily="2" charset="-78"/>
                 <a:cs typeface="Amiri" pitchFamily="2" charset="-78"/>
               </a:rPr>
               <a:t>رَكِبْنَا الجِمَالَ</a:t>
@@ -8736,11 +8796,12 @@
               <a:buNone/>
             </a:pPr>
             <a:r>
-              <a:rPr lang="en-US" sz="950" b="1" dirty="0">
+              <a:rPr lang="ar-SA" sz="950" b="1" dirty="0">
                 <a:solidFill>
                   <a:srgbClr val="FFFFFF"/>
                 </a:solidFill>
                 <a:latin typeface="Calibri" pitchFamily="34" charset="0"/>
+                <a:ea typeface="Amiri" pitchFamily="2" charset="-78"/>
                 <a:cs typeface="Amiri" pitchFamily="2" charset="-78"/>
               </a:rPr>
               <a:t>أُرِيدُ أَنْ أَزُورَ</a:t>
@@ -8874,6 +8935,7 @@
                   <a:srgbClr val="D4AF37"/>
                 </a:solidFill>
                 <a:latin typeface="Amiri" pitchFamily="2" charset="-78"/>
+                <a:ea typeface="Amiri" pitchFamily="2" charset="-78"/>
                 <a:cs typeface="Amiri" pitchFamily="2" charset="-78"/>
               </a:rPr>
               <a:t>م</a:t>
@@ -9131,6 +9193,7 @@
                   <a:srgbClr val="8A6D1E"/>
                 </a:solidFill>
                 <a:latin typeface="Amiri" pitchFamily="2" charset="-78"/>
+                <a:ea typeface="Amiri" pitchFamily="2" charset="-78"/>
                 <a:cs typeface="Amiri" pitchFamily="2" charset="-78"/>
               </a:rPr>
               <a:t>أ</a:t>
@@ -9195,6 +9258,7 @@
                   <a:srgbClr val="1B3B6F"/>
                 </a:solidFill>
                 <a:latin typeface="Amiri" pitchFamily="2" charset="-78"/>
+                <a:ea typeface="Amiri" pitchFamily="2" charset="-78"/>
                 <a:cs typeface="Amiri" pitchFamily="2" charset="-78"/>
               </a:rPr>
               <a:t>أ</a:t>
@@ -9246,6 +9310,7 @@
                   <a:srgbClr val="8A6D1E"/>
                 </a:solidFill>
                 <a:latin typeface="Amiri" pitchFamily="2" charset="-78"/>
+                <a:ea typeface="Amiri" pitchFamily="2" charset="-78"/>
                 <a:cs typeface="Amiri" pitchFamily="2" charset="-78"/>
               </a:rPr>
               <a:t>نَمُوذَجُ الإِجَابَةِ</a:t>
@@ -9359,6 +9424,7 @@
                   <a:srgbClr val="1F2A37"/>
                 </a:solidFill>
                 <a:latin typeface="Amiri" pitchFamily="2" charset="-78"/>
+                <a:ea typeface="Amiri" pitchFamily="2" charset="-78"/>
                 <a:cs typeface="Amiri" pitchFamily="2" charset="-78"/>
               </a:rPr>
               <a:t>لَمْ أَكُنْ أَتَوَقَّعُ أَنْ تَكُونَ رِحْلَتُنَا إِلَى المَغْرِبِ فِي الصَّيْفِ المَاضِي أَجْمَلَ رِحْلَةٍ فِي حَيَاتِي. سَافَرْنَا بِالطَّائِرَةِ إِلَى مُرَّاكُشَ، وَاسْتَغْرَقَتِ الرِّحْلَةُ أَرْبَعَ سَاعَاتٍ، ثُمَّ نَزَلْنَا فِي رِيَاضٍ تَقْلِيدِيٍّ؛ وَهُوَ بَيْتٌ قَدِيمٌ تَتَوَسَّطُهُ حَدِيقَةٌ صَغِيرَةٌ فِيهَا نَافُورَةٌ وَأَشْجَارُ بُرْتُقَالٍ.</a:t>
@@ -9378,6 +9444,7 @@
                   <a:srgbClr val="1F2A37"/>
                 </a:solidFill>
                 <a:latin typeface="Amiri" pitchFamily="2" charset="-78"/>
+                <a:ea typeface="Amiri" pitchFamily="2" charset="-78"/>
                 <a:cs typeface="Amiri" pitchFamily="2" charset="-78"/>
               </a:rPr>
               <a:t>قَضَيْنَا الأَيَّامَ الأُولَى نَتَجَوَّلُ فِي الأَسْوَاقِ المُلَوَّنَةِ، وَنَتَذَوَّقُ الطَّاجِينَ وَالشَّايَ بِالنَّعْنَاعِ، أَمَّا المَسَاءُ فَكُنَّا نَقْضِيهِ فِي سَاحَةِ جَامِعِ الفَنَا بَيْنَ المُوسِيقِيِّينَ وَالحَكَوَاتِيِّينَ وَبَائِعِي العَصِيرِ الطَّازَجِ.</a:t>
@@ -9397,6 +9464,7 @@
                   <a:srgbClr val="1F2A37"/>
                 </a:solidFill>
                 <a:latin typeface="Amiri" pitchFamily="2" charset="-78"/>
+                <a:ea typeface="Amiri" pitchFamily="2" charset="-78"/>
                 <a:cs typeface="Amiri" pitchFamily="2" charset="-78"/>
               </a:rPr>
               <a:t>غَيْرَ أَنَّ الرِّحْلَةَ لَمْ تَخْلُ مِنَ المَشَاكِلِ؛ فَفِي طَرِيقِنَا إِلَى الصَّحْرَاءِ تَعَطَّلَتِ الحَافِلَةُ، فَانْتَظَرْنَا ثَلَاثَ سَاعَاتٍ تَحْتَ الشَّمْسِ الحَارِقَةِ، وَبَدَأَ الجَمِيعُ يَشْعُرُونَ بِالقَلَقِ وَالعَطَشِ. لٰكِنَّ أَهْلَ قَرْيَةٍ قَرِيبَةٍ دَعَوْنَا إِلَى بَيْتِهِمْ، وَقَدَّمُوا لَنَا الخُبْزَ السَّاخِنَ، فَتَحَوَّلَتِ المُشْكِلَةُ إِلَى أَجْمَلِ ذِكْرَى.</a:t>
@@ -9416,6 +9484,7 @@
                   <a:srgbClr val="1F2A37"/>
                 </a:solidFill>
                 <a:latin typeface="Amiri" pitchFamily="2" charset="-78"/>
+                <a:ea typeface="Amiri" pitchFamily="2" charset="-78"/>
                 <a:cs typeface="Amiri" pitchFamily="2" charset="-78"/>
               </a:rPr>
               <a:t>تَعَلَّمْتُ أَنَّ السَّفَرَ لَيْسَ أَمَاكِنَ فَقَطْ، بَلْ نَاسٌ أَيْضًا، وَأَنَّ الكَرَمَ لَا يَحْتَاجُ إِلَى لُغَةٍ مُشْتَرَكَةٍ. إِذَا سَنَحَتْ لِي الفُرْصَةُ، سَأَرْجِعُ لِأَزُورَ فَاسَ، وَلَوْ كُنْتُ أَتَكَلَّمُ الدَّارِجَةَ، لَتَحَدَّثْتُ مَعَهُمْ أَكْثَرَ.</a:t>
@@ -9514,11 +9583,12 @@
               <a:buNone/>
             </a:pPr>
             <a:r>
-              <a:rPr lang="en-US" sz="950" b="1" dirty="0">
+              <a:rPr lang="ar-SA" sz="950" b="1" dirty="0">
                 <a:solidFill>
                   <a:srgbClr val="FFFFFF"/>
                 </a:solidFill>
                 <a:latin typeface="Calibri" pitchFamily="34" charset="0"/>
+                <a:ea typeface="Amiri" pitchFamily="2" charset="-78"/>
                 <a:cs typeface="Amiri" pitchFamily="2" charset="-78"/>
               </a:rPr>
               <a:t>لَمْ أَكُنْ أَتَوَقَّعُ</a:t>
@@ -9579,11 +9649,12 @@
               <a:buNone/>
             </a:pPr>
             <a:r>
-              <a:rPr lang="en-US" sz="950" b="1" dirty="0">
+              <a:rPr lang="ar-SA" sz="950" b="1" dirty="0">
                 <a:solidFill>
                   <a:srgbClr val="FFFFFF"/>
                 </a:solidFill>
                 <a:latin typeface="Calibri" pitchFamily="34" charset="0"/>
+                <a:ea typeface="Amiri" pitchFamily="2" charset="-78"/>
                 <a:cs typeface="Amiri" pitchFamily="2" charset="-78"/>
               </a:rPr>
               <a:t>أَمَّا المَسَاءُ فَكُنَّا</a:t>
@@ -9644,11 +9715,12 @@
               <a:buNone/>
             </a:pPr>
             <a:r>
-              <a:rPr lang="en-US" sz="950" b="1" dirty="0">
+              <a:rPr lang="ar-SA" sz="950" b="1" dirty="0">
                 <a:solidFill>
                   <a:srgbClr val="FFFFFF"/>
                 </a:solidFill>
                 <a:latin typeface="Calibri" pitchFamily="34" charset="0"/>
+                <a:ea typeface="Amiri" pitchFamily="2" charset="-78"/>
                 <a:cs typeface="Amiri" pitchFamily="2" charset="-78"/>
               </a:rPr>
               <a:t>فَتَحَوَّلَتِ المُشْكِلَةُ</a:t>
@@ -9709,11 +9781,12 @@
               <a:buNone/>
             </a:pPr>
             <a:r>
-              <a:rPr lang="en-US" sz="950" b="1" dirty="0">
+              <a:rPr lang="ar-SA" sz="950" b="1" dirty="0">
                 <a:solidFill>
                   <a:srgbClr val="FFFFFF"/>
                 </a:solidFill>
                 <a:latin typeface="Calibri" pitchFamily="34" charset="0"/>
+                <a:ea typeface="Amiri" pitchFamily="2" charset="-78"/>
                 <a:cs typeface="Amiri" pitchFamily="2" charset="-78"/>
               </a:rPr>
               <a:t>لَوْ كُنْتُ أَتَكَلَّمُ … لَتَحَدَّثْتُ</a:t>
@@ -9847,6 +9920,7 @@
                   <a:srgbClr val="D4AF37"/>
                 </a:solidFill>
                 <a:latin typeface="Amiri" pitchFamily="2" charset="-78"/>
+                <a:ea typeface="Amiri" pitchFamily="2" charset="-78"/>
                 <a:cs typeface="Amiri" pitchFamily="2" charset="-78"/>
               </a:rPr>
               <a:t>م</a:t>
@@ -10104,6 +10178,7 @@
                   <a:srgbClr val="8A6D1E"/>
                 </a:solidFill>
                 <a:latin typeface="Amiri" pitchFamily="2" charset="-78"/>
+                <a:ea typeface="Amiri" pitchFamily="2" charset="-78"/>
                 <a:cs typeface="Amiri" pitchFamily="2" charset="-78"/>
               </a:rPr>
               <a:t>ب</a:t>
@@ -10168,6 +10243,7 @@
                   <a:srgbClr val="1B3B6F"/>
                 </a:solidFill>
                 <a:latin typeface="Amiri" pitchFamily="2" charset="-78"/>
+                <a:ea typeface="Amiri" pitchFamily="2" charset="-78"/>
                 <a:cs typeface="Amiri" pitchFamily="2" charset="-78"/>
               </a:rPr>
               <a:t>ب</a:t>
@@ -10219,6 +10295,7 @@
                   <a:srgbClr val="8A6D1E"/>
                 </a:solidFill>
                 <a:latin typeface="Amiri" pitchFamily="2" charset="-78"/>
+                <a:ea typeface="Amiri" pitchFamily="2" charset="-78"/>
                 <a:cs typeface="Amiri" pitchFamily="2" charset="-78"/>
               </a:rPr>
               <a:t>نَمُوذَجُ الإِجَابَةِ</a:t>
@@ -10332,6 +10409,7 @@
                   <a:srgbClr val="1F2A37"/>
                 </a:solidFill>
                 <a:latin typeface="Amiri" pitchFamily="2" charset="-78"/>
+                <a:ea typeface="Amiri" pitchFamily="2" charset="-78"/>
                 <a:cs typeface="Amiri" pitchFamily="2" charset="-78"/>
               </a:rPr>
               <a:t>أَصْبَحَتِ السِّيَاحَةُ مِنْ أَهَمِّ الصِّنَاعَاتِ فِي العَالَمِ، فَهِيَ تُوَفِّرُ مَلَايِينَ فُرَصِ العَمَلِ، وَتُعَرِّفُ الشُّعُوبَ بِبَعْضِهَا، وَتُسَاعِدُ عَلَى حِمَايَةِ الآثَارِ القَدِيمَةِ. فَحِينَ يَزُورُ السَّائِحُ مِصْرَ أَوِ الأُرْدُنَّ، يَشْتَرِي مِنَ الأَسْوَاقِ، وَيَنْزِلُ فِي الفَنَادِقِ، وَيَأْكُلُ فِي المَطَاعِمِ المَحَلِّيَّةِ، فَيَسْتَفِيدُ أَهْلُ البَلَدِ مُبَاشَرَةً.</a:t>
@@ -10351,6 +10429,7 @@
                   <a:srgbClr val="1F2A37"/>
                 </a:solidFill>
                 <a:latin typeface="Amiri" pitchFamily="2" charset="-78"/>
+                <a:ea typeface="Amiri" pitchFamily="2" charset="-78"/>
                 <a:cs typeface="Amiri" pitchFamily="2" charset="-78"/>
               </a:rPr>
               <a:t>فِي المَاضِي كَانَ السَّفَرُ لِلْأَغْنِيَاءِ فَقَطْ، أَمَّا اليَوْمَ فَقَدْ أَصْبَحَتِ الرِّحْلَاتُ أَرْخَصَ، وَصِرْنَا نَحْجِزُ كُلَّ شَيْءٍ بِالهَاتِفِ. وَهٰذَا جَمِيلٌ، غَيْرَ أَنَّهُ جَعَلَ بَعْضَ المُدُنِ مُزْدَحِمَةً بِالسُّيَّاحِ طُولَ السَّنَةِ.</a:t>
@@ -10370,6 +10449,7 @@
                   <a:srgbClr val="1F2A37"/>
                 </a:solidFill>
                 <a:latin typeface="Amiri" pitchFamily="2" charset="-78"/>
+                <a:ea typeface="Amiri" pitchFamily="2" charset="-78"/>
                 <a:cs typeface="Amiri" pitchFamily="2" charset="-78"/>
               </a:rPr>
               <a:t>فِي الصَّيْفِ المَاضِي زُرْتُ مَدِينَةً سَاحِلِيَّةً جَمِيلَةً، فَلَاحَظْتُ أَنَّ الشَّاطِئَ مَلِيءٌ بِالقُمَامَةِ، وَأَنَّ أَهْلَ المَدِينَةِ يَشْكُونَ مِنْ غَلَاءِ الأَسْعَارِ بِسَبَبِ السُّيَّاحِ. فَقَرَّرْتُ مَعَ أُخْتِي أَنْ نُنَظِّفَ جُزْءًا مِنَ الشَّاطِئِ، فَانْضَمَّ إِلَيْنَا سُيَّاحٌ آخَرُونَ، وَجَمَعْنَا عِشْرِينَ كِيسًا فِي سَاعَتَيْنِ.</a:t>
@@ -10389,6 +10469,7 @@
                   <a:srgbClr val="1F2A37"/>
                 </a:solidFill>
                 <a:latin typeface="Amiri" pitchFamily="2" charset="-78"/>
+                <a:ea typeface="Amiri" pitchFamily="2" charset="-78"/>
                 <a:cs typeface="Amiri" pitchFamily="2" charset="-78"/>
               </a:rPr>
               <a:t>صَحِيحٌ أَنَّ لِلسِّيَاحَةِ سَلْبِيَّاتٍ، غَيْرَ أَنَّ فَوَائِدَهَا أَكْبَرُ إِذَا احْتَرَمْنَا البِيئَةَ وَالنَّاسَ. وَلَوِ اهْتَمَّ كُلُّ سَائِحٍ بِالمَكَانِ كَمَا يَهْتَمُّ بِبَيْتِهِ، لَبَقِيَتْ مُدُنُنَا جَمِيلَةً لِلْأَجْيَالِ القَادِمَةِ.</a:t>
@@ -10487,11 +10568,12 @@
               <a:buNone/>
             </a:pPr>
             <a:r>
-              <a:rPr lang="en-US" sz="950" b="1" dirty="0">
+              <a:rPr lang="ar-SA" sz="950" b="1" dirty="0">
                 <a:solidFill>
                   <a:srgbClr val="FFFFFF"/>
                 </a:solidFill>
                 <a:latin typeface="Calibri" pitchFamily="34" charset="0"/>
+                <a:ea typeface="Amiri" pitchFamily="2" charset="-78"/>
                 <a:cs typeface="Amiri" pitchFamily="2" charset="-78"/>
               </a:rPr>
               <a:t>مِنْ أَهَمِّ الصِّنَاعَاتِ</a:t>
@@ -10552,11 +10634,12 @@
               <a:buNone/>
             </a:pPr>
             <a:r>
-              <a:rPr lang="en-US" sz="950" b="1" dirty="0">
+              <a:rPr lang="ar-SA" sz="950" b="1" dirty="0">
                 <a:solidFill>
                   <a:srgbClr val="FFFFFF"/>
                 </a:solidFill>
                 <a:latin typeface="Calibri" pitchFamily="34" charset="0"/>
+                <a:ea typeface="Amiri" pitchFamily="2" charset="-78"/>
                 <a:cs typeface="Amiri" pitchFamily="2" charset="-78"/>
               </a:rPr>
               <a:t>أَمَّا اليَوْمَ فَقَدْ</a:t>
@@ -10617,11 +10700,12 @@
               <a:buNone/>
             </a:pPr>
             <a:r>
-              <a:rPr lang="en-US" sz="950" b="1" dirty="0">
+              <a:rPr lang="ar-SA" sz="950" b="1" dirty="0">
                 <a:solidFill>
                   <a:srgbClr val="FFFFFF"/>
                 </a:solidFill>
                 <a:latin typeface="Calibri" pitchFamily="34" charset="0"/>
+                <a:ea typeface="Amiri" pitchFamily="2" charset="-78"/>
                 <a:cs typeface="Amiri" pitchFamily="2" charset="-78"/>
               </a:rPr>
               <a:t>فَقَرَّرْتُ … أَنْ نُنَظِّفَ</a:t>
@@ -10682,11 +10766,12 @@
               <a:buNone/>
             </a:pPr>
             <a:r>
-              <a:rPr lang="en-US" sz="950" b="1" dirty="0">
+              <a:rPr lang="ar-SA" sz="950" b="1" dirty="0">
                 <a:solidFill>
                   <a:srgbClr val="FFFFFF"/>
                 </a:solidFill>
                 <a:latin typeface="Calibri" pitchFamily="34" charset="0"/>
+                <a:ea typeface="Amiri" pitchFamily="2" charset="-78"/>
                 <a:cs typeface="Amiri" pitchFamily="2" charset="-78"/>
               </a:rPr>
               <a:t>لَوِ اهْتَمَّ … لَبَقِيَتْ</a:t>
@@ -10820,6 +10905,7 @@
                   <a:srgbClr val="D4AF37"/>
                 </a:solidFill>
                 <a:latin typeface="Amiri" pitchFamily="2" charset="-78"/>
+                <a:ea typeface="Amiri" pitchFamily="2" charset="-78"/>
                 <a:cs typeface="Amiri" pitchFamily="2" charset="-78"/>
               </a:rPr>
               <a:t>م</a:t>
@@ -11140,6 +11226,7 @@
                   <a:srgbClr val="8A6D1E"/>
                 </a:solidFill>
                 <a:latin typeface="Amiri" pitchFamily="2" charset="-78"/>
+                <a:ea typeface="Amiri" pitchFamily="2" charset="-78"/>
                 <a:cs typeface="Amiri" pitchFamily="2" charset="-78"/>
               </a:rPr>
               <a:t>قَيِّمْ عَمَلَكَ</a:t>
@@ -12384,6 +12471,7 @@
                   <a:srgbClr val="FFFFFF"/>
                 </a:solidFill>
                 <a:latin typeface="Amiri" pitchFamily="2" charset="-78"/>
+                <a:ea typeface="Amiri" pitchFamily="2" charset="-78"/>
                 <a:cs typeface="Amiri" pitchFamily="2" charset="-78"/>
               </a:rPr>
               <a:t>أَحْسَنْتُمْ! إِلَى اللِّقَاءِ</a:t>
@@ -12536,6 +12624,7 @@
                   <a:srgbClr val="D4AF37"/>
                 </a:solidFill>
                 <a:latin typeface="Amiri" pitchFamily="2" charset="-78"/>
+                <a:ea typeface="Amiri" pitchFamily="2" charset="-78"/>
                 <a:cs typeface="Amiri" pitchFamily="2" charset="-78"/>
               </a:rPr>
               <a:t>وَرْشَةُ التَّدْرِيبِ</a:t>
@@ -12669,6 +12758,7 @@
                   <a:srgbClr val="D4AF37"/>
                 </a:solidFill>
                 <a:latin typeface="Amiri" pitchFamily="2" charset="-78"/>
+                <a:ea typeface="Amiri" pitchFamily="2" charset="-78"/>
                 <a:cs typeface="Amiri" pitchFamily="2" charset="-78"/>
               </a:rPr>
               <a:t>م</a:t>
@@ -12989,6 +13079,7 @@
                   <a:srgbClr val="8A6D1E"/>
                 </a:solidFill>
                 <a:latin typeface="Amiri" pitchFamily="2" charset="-78"/>
+                <a:ea typeface="Amiri" pitchFamily="2" charset="-78"/>
                 <a:cs typeface="Amiri" pitchFamily="2" charset="-78"/>
               </a:rPr>
               <a:t>آدَابُ الصَّفِّ</a:t>
@@ -14520,6 +14611,7 @@
                   <a:srgbClr val="D4AF37"/>
                 </a:solidFill>
                 <a:latin typeface="Amiri" pitchFamily="2" charset="-78"/>
+                <a:ea typeface="Amiri" pitchFamily="2" charset="-78"/>
                 <a:cs typeface="Amiri" pitchFamily="2" charset="-78"/>
               </a:rPr>
               <a:t>م</a:t>
@@ -14840,6 +14932,7 @@
                   <a:srgbClr val="8A6D1E"/>
                 </a:solidFill>
                 <a:latin typeface="Amiri" pitchFamily="2" charset="-78"/>
+                <a:ea typeface="Amiri" pitchFamily="2" charset="-78"/>
                 <a:cs typeface="Amiri" pitchFamily="2" charset="-78"/>
               </a:rPr>
               <a:t>خَرِيطَةُ الوَرْشَةِ</a:t>
@@ -15154,6 +15247,7 @@
                   <a:srgbClr val="1B3B6F"/>
                 </a:solidFill>
                 <a:latin typeface="Amiri" pitchFamily="2" charset="-78"/>
+                <a:ea typeface="Amiri" pitchFamily="2" charset="-78"/>
                 <a:cs typeface="Amiri" pitchFamily="2" charset="-78"/>
               </a:rPr>
               <a:t>كَيْفَ</a:t>
@@ -15430,6 +15524,7 @@
                   <a:srgbClr val="1E6B52"/>
                 </a:solidFill>
                 <a:latin typeface="Amiri" pitchFamily="2" charset="-78"/>
+                <a:ea typeface="Amiri" pitchFamily="2" charset="-78"/>
                 <a:cs typeface="Amiri" pitchFamily="2" charset="-78"/>
               </a:rPr>
               <a:t>الاسْتِمَارَةُ</a:t>
@@ -15706,6 +15801,7 @@
                   <a:srgbClr val="1E6B52"/>
                 </a:solidFill>
                 <a:latin typeface="Amiri" pitchFamily="2" charset="-78"/>
+                <a:ea typeface="Amiri" pitchFamily="2" charset="-78"/>
                 <a:cs typeface="Amiri" pitchFamily="2" charset="-78"/>
               </a:rPr>
               <a:t>الرِّسَالَةُ</a:t>
@@ -15982,6 +16078,7 @@
                   <a:srgbClr val="1E6B52"/>
                 </a:solidFill>
                 <a:latin typeface="Amiri" pitchFamily="2" charset="-78"/>
+                <a:ea typeface="Amiri" pitchFamily="2" charset="-78"/>
                 <a:cs typeface="Amiri" pitchFamily="2" charset="-78"/>
               </a:rPr>
               <a:t>المَقَالُ</a:t>
@@ -16258,6 +16355,7 @@
                   <a:srgbClr val="8A6D1E"/>
                 </a:solidFill>
                 <a:latin typeface="Amiri" pitchFamily="2" charset="-78"/>
+                <a:ea typeface="Amiri" pitchFamily="2" charset="-78"/>
                 <a:cs typeface="Amiri" pitchFamily="2" charset="-78"/>
               </a:rPr>
               <a:t>قَيِّمْ</a:t>
@@ -16501,6 +16599,7 @@
                   <a:srgbClr val="D4AF37"/>
                 </a:solidFill>
                 <a:latin typeface="Amiri" pitchFamily="2" charset="-78"/>
+                <a:ea typeface="Amiri" pitchFamily="2" charset="-78"/>
                 <a:cs typeface="Amiri" pitchFamily="2" charset="-78"/>
               </a:rPr>
               <a:t>م</a:t>
@@ -16821,6 +16920,7 @@
                   <a:srgbClr val="8A6D1E"/>
                 </a:solidFill>
                 <a:latin typeface="Amiri" pitchFamily="2" charset="-78"/>
+                <a:ea typeface="Amiri" pitchFamily="2" charset="-78"/>
                 <a:cs typeface="Amiri" pitchFamily="2" charset="-78"/>
               </a:rPr>
               <a:t>امْتِحَانُ الكِتَابَةِ</a:t>
@@ -17445,6 +17545,7 @@
                   <a:srgbClr val="1B3B6F"/>
                 </a:solidFill>
                 <a:latin typeface="Amiri" pitchFamily="2" charset="-78"/>
+                <a:ea typeface="Amiri" pitchFamily="2" charset="-78"/>
                 <a:cs typeface="Amiri" pitchFamily="2" charset="-78"/>
               </a:rPr>
               <a:t>نَزَلْنَا فِي فُنْدُقٍ يُطِلُّ عَلَى البَحْرِ</a:t>
@@ -17544,6 +17645,7 @@
                   <a:srgbClr val="1B3B6F"/>
                 </a:solidFill>
                 <a:latin typeface="Amiri" pitchFamily="2" charset="-78"/>
+                <a:ea typeface="Amiri" pitchFamily="2" charset="-78"/>
                 <a:cs typeface="Amiri" pitchFamily="2" charset="-78"/>
               </a:rPr>
               <a:t>إِذَا بَقِيَ عِنْدَنَا وَقْتٌ، سَنَذْهَبُ …</a:t>
@@ -17643,6 +17745,7 @@
                   <a:srgbClr val="1B3B6F"/>
                 </a:solidFill>
                 <a:latin typeface="Amiri" pitchFamily="2" charset="-78"/>
+                <a:ea typeface="Amiri" pitchFamily="2" charset="-78"/>
                 <a:cs typeface="Amiri" pitchFamily="2" charset="-78"/>
               </a:rPr>
               <a:t>لَوْ كُنْتَ مَعَنَا، لَكَانَتِ الرِّحْلَةُ أَجْمَلَ</a:t>
@@ -17814,6 +17917,7 @@
                   <a:srgbClr val="D4AF37"/>
                 </a:solidFill>
                 <a:latin typeface="Amiri" pitchFamily="2" charset="-78"/>
+                <a:ea typeface="Amiri" pitchFamily="2" charset="-78"/>
                 <a:cs typeface="Amiri" pitchFamily="2" charset="-78"/>
               </a:rPr>
               <a:t>م</a:t>
@@ -18134,6 +18238,7 @@
                   <a:srgbClr val="8A6D1E"/>
                 </a:solidFill>
                 <a:latin typeface="Amiri" pitchFamily="2" charset="-78"/>
+                <a:ea typeface="Amiri" pitchFamily="2" charset="-78"/>
                 <a:cs typeface="Amiri" pitchFamily="2" charset="-78"/>
               </a:rPr>
               <a:t>بِطَاقَةُ التَّسْجِيلِ فِي الفُنْدُقِ</a:t>
@@ -18490,6 +18595,7 @@
                   <a:srgbClr val="1B3B6F"/>
                 </a:solidFill>
                 <a:latin typeface="Amiri" pitchFamily="2" charset="-78"/>
+                <a:ea typeface="Amiri" pitchFamily="2" charset="-78"/>
                 <a:cs typeface="Amiri" pitchFamily="2" charset="-78"/>
               </a:rPr>
               <a:t>الاسْمُ الكَامِلُ</a:t>
@@ -18734,6 +18840,7 @@
                   <a:srgbClr val="1B3B6F"/>
                 </a:solidFill>
                 <a:latin typeface="Amiri" pitchFamily="2" charset="-78"/>
+                <a:ea typeface="Amiri" pitchFamily="2" charset="-78"/>
                 <a:cs typeface="Amiri" pitchFamily="2" charset="-78"/>
               </a:rPr>
               <a:t>الجِنْسِيَّةُ</a:t>
@@ -18978,6 +19085,7 @@
                   <a:srgbClr val="1B3B6F"/>
                 </a:solidFill>
                 <a:latin typeface="Amiri" pitchFamily="2" charset="-78"/>
+                <a:ea typeface="Amiri" pitchFamily="2" charset="-78"/>
                 <a:cs typeface="Amiri" pitchFamily="2" charset="-78"/>
               </a:rPr>
               <a:t>تَارِيخُ الوُصُولِ</a:t>
@@ -19222,6 +19330,7 @@
                   <a:srgbClr val="1B3B6F"/>
                 </a:solidFill>
                 <a:latin typeface="Amiri" pitchFamily="2" charset="-78"/>
+                <a:ea typeface="Amiri" pitchFamily="2" charset="-78"/>
                 <a:cs typeface="Amiri" pitchFamily="2" charset="-78"/>
               </a:rPr>
               <a:t>عَدَدُ اللَّيَالِي</a:t>
@@ -19466,6 +19575,7 @@
                   <a:srgbClr val="1B3B6F"/>
                 </a:solidFill>
                 <a:latin typeface="Amiri" pitchFamily="2" charset="-78"/>
+                <a:ea typeface="Amiri" pitchFamily="2" charset="-78"/>
                 <a:cs typeface="Amiri" pitchFamily="2" charset="-78"/>
               </a:rPr>
               <a:t>نَوْعُ الغُرْفَةِ</a:t>
@@ -19710,6 +19820,7 @@
                   <a:srgbClr val="1B3B6F"/>
                 </a:solidFill>
                 <a:latin typeface="Amiri" pitchFamily="2" charset="-78"/>
+                <a:ea typeface="Amiri" pitchFamily="2" charset="-78"/>
                 <a:cs typeface="Amiri" pitchFamily="2" charset="-78"/>
               </a:rPr>
               <a:t>سَبَبُ الزِّيَارَةِ</a:t>
@@ -19954,6 +20065,7 @@
                   <a:srgbClr val="1B3B6F"/>
                 </a:solidFill>
                 <a:latin typeface="Amiri" pitchFamily="2" charset="-78"/>
+                <a:ea typeface="Amiri" pitchFamily="2" charset="-78"/>
                 <a:cs typeface="Amiri" pitchFamily="2" charset="-78"/>
               </a:rPr>
               <a:t>طَلَبٌ خَاصٌّ</a:t>
@@ -20133,6 +20245,7 @@
                   <a:srgbClr val="1B3B6F"/>
                 </a:solidFill>
                 <a:latin typeface="Amiri" pitchFamily="2" charset="-78"/>
+                <a:ea typeface="Amiri" pitchFamily="2" charset="-78"/>
                 <a:cs typeface="Amiri" pitchFamily="2" charset="-78"/>
               </a:rPr>
               <a:t>جُمْلَةٌ: مَاذَا تُرِيدُ أَنْ تَزُورَ؟</a:t>
@@ -20342,6 +20455,7 @@
                   <a:srgbClr val="D4AF37"/>
                 </a:solidFill>
                 <a:latin typeface="Amiri" pitchFamily="2" charset="-78"/>
+                <a:ea typeface="Amiri" pitchFamily="2" charset="-78"/>
                 <a:cs typeface="Amiri" pitchFamily="2" charset="-78"/>
               </a:rPr>
               <a:t>م</a:t>
@@ -20662,6 +20776,7 @@
                   <a:srgbClr val="8A6D1E"/>
                 </a:solidFill>
                 <a:latin typeface="Amiri" pitchFamily="2" charset="-78"/>
+                <a:ea typeface="Amiri" pitchFamily="2" charset="-78"/>
                 <a:cs typeface="Amiri" pitchFamily="2" charset="-78"/>
               </a:rPr>
               <a:t>نَمُوذَجُ الإِجَابَةِ</a:t>
@@ -20980,6 +21095,7 @@
                   <a:srgbClr val="1B3B6F"/>
                 </a:solidFill>
                 <a:latin typeface="Amiri" pitchFamily="2" charset="-78"/>
+                <a:ea typeface="Amiri" pitchFamily="2" charset="-78"/>
                 <a:cs typeface="Amiri" pitchFamily="2" charset="-78"/>
               </a:rPr>
               <a:t>رِيمُ خَالِدٍ</a:t>
@@ -21018,6 +21134,7 @@
                   <a:srgbClr val="1B3B6F"/>
                 </a:solidFill>
                 <a:latin typeface="Amiri" pitchFamily="2" charset="-78"/>
+                <a:ea typeface="Amiri" pitchFamily="2" charset="-78"/>
                 <a:cs typeface="Amiri" pitchFamily="2" charset="-78"/>
               </a:rPr>
               <a:t>الاسْمُ الكَامِلُ</a:t>
@@ -21159,6 +21276,7 @@
                   <a:srgbClr val="1B3B6F"/>
                 </a:solidFill>
                 <a:latin typeface="Amiri" pitchFamily="2" charset="-78"/>
+                <a:ea typeface="Amiri" pitchFamily="2" charset="-78"/>
                 <a:cs typeface="Amiri" pitchFamily="2" charset="-78"/>
               </a:rPr>
               <a:t>بِرِيطَانِيَّةٌ</a:t>
@@ -21197,6 +21315,7 @@
                   <a:srgbClr val="1B3B6F"/>
                 </a:solidFill>
                 <a:latin typeface="Amiri" pitchFamily="2" charset="-78"/>
+                <a:ea typeface="Amiri" pitchFamily="2" charset="-78"/>
                 <a:cs typeface="Amiri" pitchFamily="2" charset="-78"/>
               </a:rPr>
               <a:t>الجِنْسِيَّةُ</a:t>
@@ -21338,6 +21457,7 @@
                   <a:srgbClr val="1B3B6F"/>
                 </a:solidFill>
                 <a:latin typeface="Amiri" pitchFamily="2" charset="-78"/>
+                <a:ea typeface="Amiri" pitchFamily="2" charset="-78"/>
                 <a:cs typeface="Amiri" pitchFamily="2" charset="-78"/>
               </a:rPr>
               <a:t>السَّبْتُ ١٢ يُولْيُو</a:t>
@@ -21376,6 +21496,7 @@
                   <a:srgbClr val="1B3B6F"/>
                 </a:solidFill>
                 <a:latin typeface="Amiri" pitchFamily="2" charset="-78"/>
+                <a:ea typeface="Amiri" pitchFamily="2" charset="-78"/>
                 <a:cs typeface="Amiri" pitchFamily="2" charset="-78"/>
               </a:rPr>
               <a:t>تَارِيخُ الوُصُولِ</a:t>
@@ -21517,6 +21638,7 @@
                   <a:srgbClr val="1B3B6F"/>
                 </a:solidFill>
                 <a:latin typeface="Amiri" pitchFamily="2" charset="-78"/>
+                <a:ea typeface="Amiri" pitchFamily="2" charset="-78"/>
                 <a:cs typeface="Amiri" pitchFamily="2" charset="-78"/>
               </a:rPr>
               <a:t>خَمْسُ لَيَالٍ</a:t>
@@ -21555,6 +21677,7 @@
                   <a:srgbClr val="1B3B6F"/>
                 </a:solidFill>
                 <a:latin typeface="Amiri" pitchFamily="2" charset="-78"/>
+                <a:ea typeface="Amiri" pitchFamily="2" charset="-78"/>
                 <a:cs typeface="Amiri" pitchFamily="2" charset="-78"/>
               </a:rPr>
               <a:t>عَدَدُ اللَّيَالِي</a:t>
@@ -21696,6 +21819,7 @@
                   <a:srgbClr val="1B3B6F"/>
                 </a:solidFill>
                 <a:latin typeface="Amiri" pitchFamily="2" charset="-78"/>
+                <a:ea typeface="Amiri" pitchFamily="2" charset="-78"/>
                 <a:cs typeface="Amiri" pitchFamily="2" charset="-78"/>
               </a:rPr>
               <a:t>غُرْفَةٌ مُزْدَوِجَةٌ</a:t>
@@ -21734,6 +21858,7 @@
                   <a:srgbClr val="1B3B6F"/>
                 </a:solidFill>
                 <a:latin typeface="Amiri" pitchFamily="2" charset="-78"/>
+                <a:ea typeface="Amiri" pitchFamily="2" charset="-78"/>
                 <a:cs typeface="Amiri" pitchFamily="2" charset="-78"/>
               </a:rPr>
               <a:t>نَوْعُ الغُرْفَةِ</a:t>
@@ -21875,6 +22000,7 @@
                   <a:srgbClr val="1B3B6F"/>
                 </a:solidFill>
                 <a:latin typeface="Amiri" pitchFamily="2" charset="-78"/>
+                <a:ea typeface="Amiri" pitchFamily="2" charset="-78"/>
                 <a:cs typeface="Amiri" pitchFamily="2" charset="-78"/>
               </a:rPr>
               <a:t>عُطْلَةٌ عَائِلِيَّةٌ</a:t>
@@ -21913,6 +22039,7 @@
                   <a:srgbClr val="1B3B6F"/>
                 </a:solidFill>
                 <a:latin typeface="Amiri" pitchFamily="2" charset="-78"/>
+                <a:ea typeface="Amiri" pitchFamily="2" charset="-78"/>
                 <a:cs typeface="Amiri" pitchFamily="2" charset="-78"/>
               </a:rPr>
               <a:t>سَبَبُ الزِّيَارَةِ</a:t>
@@ -22054,6 +22181,7 @@
                   <a:srgbClr val="1B3B6F"/>
                 </a:solidFill>
                 <a:latin typeface="Amiri" pitchFamily="2" charset="-78"/>
+                <a:ea typeface="Amiri" pitchFamily="2" charset="-78"/>
                 <a:cs typeface="Amiri" pitchFamily="2" charset="-78"/>
               </a:rPr>
               <a:t>غُرْفَةٌ تُطِلُّ عَلَى البَحْرِ</a:t>
@@ -22092,6 +22220,7 @@
                   <a:srgbClr val="1B3B6F"/>
                 </a:solidFill>
                 <a:latin typeface="Amiri" pitchFamily="2" charset="-78"/>
+                <a:ea typeface="Amiri" pitchFamily="2" charset="-78"/>
                 <a:cs typeface="Amiri" pitchFamily="2" charset="-78"/>
               </a:rPr>
               <a:t>طَلَبٌ خَاصٌّ</a:t>
@@ -22233,6 +22362,7 @@
                   <a:srgbClr val="1B3B6F"/>
                 </a:solidFill>
                 <a:latin typeface="Amiri" pitchFamily="2" charset="-78"/>
+                <a:ea typeface="Amiri" pitchFamily="2" charset="-78"/>
                 <a:cs typeface="Amiri" pitchFamily="2" charset="-78"/>
               </a:rPr>
               <a:t>أُرِيدُ أَنْ أَزُورَ المَدِينَةَ القَدِيمَةَ وَآثَارَ قَرْطَاجَ.</a:t>
@@ -22271,6 +22401,7 @@
                   <a:srgbClr val="1B3B6F"/>
                 </a:solidFill>
                 <a:latin typeface="Amiri" pitchFamily="2" charset="-78"/>
+                <a:ea typeface="Amiri" pitchFamily="2" charset="-78"/>
                 <a:cs typeface="Amiri" pitchFamily="2" charset="-78"/>
               </a:rPr>
               <a:t>جُمْلَةٌ: مَاذَا تُرِيدُ أَنْ تَزُورَ؟</a:t>
@@ -22480,6 +22611,7 @@
                   <a:srgbClr val="D4AF37"/>
                 </a:solidFill>
                 <a:latin typeface="Amiri" pitchFamily="2" charset="-78"/>
+                <a:ea typeface="Amiri" pitchFamily="2" charset="-78"/>
                 <a:cs typeface="Amiri" pitchFamily="2" charset="-78"/>
               </a:rPr>
               <a:t>م</a:t>
@@ -22800,6 +22932,7 @@
                   <a:srgbClr val="8A6D1E"/>
                 </a:solidFill>
                 <a:latin typeface="Amiri" pitchFamily="2" charset="-78"/>
+                <a:ea typeface="Amiri" pitchFamily="2" charset="-78"/>
                 <a:cs typeface="Amiri" pitchFamily="2" charset="-78"/>
               </a:rPr>
               <a:t>رِسَالَةٌ مِنَ العُطْلَةِ</a:t>
@@ -23275,6 +23408,7 @@
                   <a:srgbClr val="1B3B6F"/>
                 </a:solidFill>
                 <a:latin typeface="Amiri" pitchFamily="2" charset="-78"/>
+                <a:ea typeface="Amiri" pitchFamily="2" charset="-78"/>
                 <a:cs typeface="Amiri" pitchFamily="2" charset="-78"/>
               </a:rPr>
               <a:t>أَنَا الآنَ فِي … مَعَ …</a:t>
@@ -23351,6 +23485,7 @@
                   <a:srgbClr val="1B3B6F"/>
                 </a:solidFill>
                 <a:latin typeface="Amiri" pitchFamily="2" charset="-78"/>
+                <a:ea typeface="Amiri" pitchFamily="2" charset="-78"/>
                 <a:cs typeface="Amiri" pitchFamily="2" charset="-78"/>
               </a:rPr>
               <a:t>نَزَلْنَا فِي فُنْدُقٍ …</a:t>
@@ -23427,6 +23562,7 @@
                   <a:srgbClr val="1B3B6F"/>
                 </a:solidFill>
                 <a:latin typeface="Amiri" pitchFamily="2" charset="-78"/>
+                <a:ea typeface="Amiri" pitchFamily="2" charset="-78"/>
                 <a:cs typeface="Amiri" pitchFamily="2" charset="-78"/>
               </a:rPr>
               <a:t>أَمْسِ زُرْنَا …</a:t>
@@ -23503,6 +23639,7 @@
                   <a:srgbClr val="1B3B6F"/>
                 </a:solidFill>
                 <a:latin typeface="Amiri" pitchFamily="2" charset="-78"/>
+                <a:ea typeface="Amiri" pitchFamily="2" charset="-78"/>
                 <a:cs typeface="Amiri" pitchFamily="2" charset="-78"/>
               </a:rPr>
               <a:t>غَدًا سَنَزُورُ …</a:t>
@@ -23674,6 +23811,7 @@
                   <a:srgbClr val="D4AF37"/>
                 </a:solidFill>
                 <a:latin typeface="Amiri" pitchFamily="2" charset="-78"/>
+                <a:ea typeface="Amiri" pitchFamily="2" charset="-78"/>
                 <a:cs typeface="Amiri" pitchFamily="2" charset="-78"/>
               </a:rPr>
               <a:t>م</a:t>
@@ -23994,6 +24132,7 @@
                   <a:srgbClr val="8A6D1E"/>
                 </a:solidFill>
                 <a:latin typeface="Amiri" pitchFamily="2" charset="-78"/>
+                <a:ea typeface="Amiri" pitchFamily="2" charset="-78"/>
                 <a:cs typeface="Amiri" pitchFamily="2" charset="-78"/>
               </a:rPr>
               <a:t>نَصُّ السُّؤَالِ</a:t>
@@ -24274,6 +24413,7 @@
                   <a:srgbClr val="1B3B6F"/>
                 </a:solidFill>
                 <a:latin typeface="Amiri" pitchFamily="2" charset="-78"/>
+                <a:ea typeface="Amiri" pitchFamily="2" charset="-78"/>
                 <a:cs typeface="Amiri" pitchFamily="2" charset="-78"/>
               </a:rPr>
               <a:t>أَنْتِ فِي عُطْلَةٍ خَارِجَ بَلَدِكِ. اكْتُبِي رِسَالَةً إِلَى صَدِيقَتِكِ (٨٠–٩٠ كَلِمَةً).</a:t>
@@ -24415,6 +24555,7 @@
                   <a:srgbClr val="1B3B6F"/>
                 </a:solidFill>
                 <a:latin typeface="Amiri" pitchFamily="2" charset="-78"/>
+                <a:ea typeface="Amiri" pitchFamily="2" charset="-78"/>
                 <a:cs typeface="Amiri" pitchFamily="2" charset="-78"/>
               </a:rPr>
               <a:t>أَيْنَ أَنْتِ؟ وَكَيْفَ سَافَرْتِ؟</a:t>
@@ -24556,6 +24697,7 @@
                   <a:srgbClr val="1B3B6F"/>
                 </a:solidFill>
                 <a:latin typeface="Amiri" pitchFamily="2" charset="-78"/>
+                <a:ea typeface="Amiri" pitchFamily="2" charset="-78"/>
                 <a:cs typeface="Amiri" pitchFamily="2" charset="-78"/>
               </a:rPr>
               <a:t>أَيْنَ تَنْزِلِينَ؟ وَكَيْفَ هُوَ؟</a:t>
@@ -24697,6 +24839,7 @@
                   <a:srgbClr val="1B3B6F"/>
                 </a:solidFill>
                 <a:latin typeface="Amiri" pitchFamily="2" charset="-78"/>
+                <a:ea typeface="Amiri" pitchFamily="2" charset="-78"/>
                 <a:cs typeface="Amiri" pitchFamily="2" charset="-78"/>
               </a:rPr>
               <a:t>مَاذَا فَعَلْتِ أَمْسِ؟</a:t>
@@ -24838,6 +24981,7 @@
                   <a:srgbClr val="1B3B6F"/>
                 </a:solidFill>
                 <a:latin typeface="Amiri" pitchFamily="2" charset="-78"/>
+                <a:ea typeface="Amiri" pitchFamily="2" charset="-78"/>
                 <a:cs typeface="Amiri" pitchFamily="2" charset="-78"/>
               </a:rPr>
               <a:t>كَيْفَ الطَّقْسُ؟ وَمَا خُطَطُكِ لِلْغَدِ؟</a:t>
@@ -25047,6 +25191,7 @@
                   <a:srgbClr val="D4AF37"/>
                 </a:solidFill>
                 <a:latin typeface="Amiri" pitchFamily="2" charset="-78"/>
+                <a:ea typeface="Amiri" pitchFamily="2" charset="-78"/>
                 <a:cs typeface="Amiri" pitchFamily="2" charset="-78"/>
               </a:rPr>
               <a:t>م</a:t>
@@ -25367,6 +25512,7 @@
                   <a:srgbClr val="8A6D1E"/>
                 </a:solidFill>
                 <a:latin typeface="Amiri" pitchFamily="2" charset="-78"/>
+                <a:ea typeface="Amiri" pitchFamily="2" charset="-78"/>
                 <a:cs typeface="Amiri" pitchFamily="2" charset="-78"/>
               </a:rPr>
               <a:t>قَوَالِبُ الكِتَابَةِ</a:t>
@@ -25647,6 +25793,7 @@
                   <a:srgbClr val="1B3B6F"/>
                 </a:solidFill>
                 <a:latin typeface="Amiri" pitchFamily="2" charset="-78"/>
+                <a:ea typeface="Amiri" pitchFamily="2" charset="-78"/>
                 <a:cs typeface="Amiri" pitchFamily="2" charset="-78"/>
               </a:rPr>
               <a:t>مَرْحَبًا يَا ______ ، كَيْفَ حَالُكِ؟</a:t>
@@ -25853,6 +26000,7 @@
                   <a:srgbClr val="1B3B6F"/>
                 </a:solidFill>
                 <a:latin typeface="Amiri" pitchFamily="2" charset="-78"/>
+                <a:ea typeface="Amiri" pitchFamily="2" charset="-78"/>
                 <a:cs typeface="Amiri" pitchFamily="2" charset="-78"/>
               </a:rPr>
               <a:t>أَنَا الآنَ فِي ______ . سَافَرْنَا ______ .</a:t>
@@ -26059,6 +26207,7 @@
                   <a:srgbClr val="1B3B6F"/>
                 </a:solidFill>
                 <a:latin typeface="Amiri" pitchFamily="2" charset="-78"/>
+                <a:ea typeface="Amiri" pitchFamily="2" charset="-78"/>
                 <a:cs typeface="Amiri" pitchFamily="2" charset="-78"/>
               </a:rPr>
               <a:t>نَزَلْنَا فِي فُنْدُقٍ ______ ، وَغُرْفَتِي ______ .</a:t>
@@ -26265,6 +26414,7 @@
                   <a:srgbClr val="1B3B6F"/>
                 </a:solidFill>
                 <a:latin typeface="Amiri" pitchFamily="2" charset="-78"/>
+                <a:ea typeface="Amiri" pitchFamily="2" charset="-78"/>
                 <a:cs typeface="Amiri" pitchFamily="2" charset="-78"/>
               </a:rPr>
               <a:t>أَمْسِ زُرْنَا ______ ، وَ ______ .</a:t>
@@ -26471,6 +26621,7 @@
                   <a:srgbClr val="1B3B6F"/>
                 </a:solidFill>
                 <a:latin typeface="Amiri" pitchFamily="2" charset="-78"/>
+                <a:ea typeface="Amiri" pitchFamily="2" charset="-78"/>
                 <a:cs typeface="Amiri" pitchFamily="2" charset="-78"/>
               </a:rPr>
               <a:t>الطَّقْسُ ______ . غَدًا سَنَزُورُ ______ .</a:t>
@@ -26677,6 +26828,7 @@
                   <a:srgbClr val="1B3B6F"/>
                 </a:solidFill>
                 <a:latin typeface="Amiri" pitchFamily="2" charset="-78"/>
+                <a:ea typeface="Amiri" pitchFamily="2" charset="-78"/>
                 <a:cs typeface="Amiri" pitchFamily="2" charset="-78"/>
               </a:rPr>
               <a:t>مَعَ السَّلَامَةِ، ______</a:t>
@@ -26916,13 +27068,9 @@
     <a:fontScheme name="Office">
       <a:majorFont>
         <a:latin typeface="Calibri Light" panose="020F0302020204030204"/>
-        <a:ea typeface=""/>
-        <a:cs typeface=""/>
-        <a:font script="Jpan" typeface="游ゴシック Light"/>
-        <a:font script="Hang" typeface="맑은 고딕"/>
-        <a:font script="Hans" typeface="等线 Light"/>
-        <a:font script="Hant" typeface="新細明體"/>
-        <a:font script="Arab" typeface="Times New Roman"/>
+        <a:ea typeface="Amiri" pitchFamily="2" charset="-78"/>
+        <a:cs typeface="Amiri" pitchFamily="2" charset="-78"/>
+        <a:font script="Arab" typeface="Amiri"/>
         <a:font script="Hebr" typeface="Times New Roman"/>
         <a:font script="Thai" typeface="Angsana New"/>
         <a:font script="Ethi" typeface="Nyala"/>
@@ -26968,13 +27116,9 @@
       </a:majorFont>
       <a:minorFont>
         <a:latin typeface="Calibri" panose="020F0502020204030204"/>
-        <a:ea typeface=""/>
-        <a:cs typeface=""/>
-        <a:font script="Jpan" typeface="游ゴシック"/>
-        <a:font script="Hang" typeface="맑은 고딕"/>
-        <a:font script="Hans" typeface="等线"/>
-        <a:font script="Hant" typeface="新細明體"/>
-        <a:font script="Arab" typeface="Arial"/>
+        <a:ea typeface="Amiri" pitchFamily="2" charset="-78"/>
+        <a:cs typeface="Amiri" pitchFamily="2" charset="-78"/>
+        <a:font script="Arab" typeface="Amiri"/>
         <a:font script="Hebr" typeface="Arial"/>
         <a:font script="Thai" typeface="Cordia New"/>
         <a:font script="Ethi" typeface="Nyala"/>

--- a/Topic_A/Exam_Practice/AT-A-L11_Writing_Workshop_Reading_Travel_and_Tourism_Texts.pptx
+++ b/Topic_A/Exam_Practice/AT-A-L11_Writing_Workshop_Reading_Travel_and_Tourism_Texts.pptx
@@ -3848,7 +3848,7 @@
                 <a:solidFill>
                   <a:srgbClr val="FFFFFF"/>
                 </a:solidFill>
-                <a:latin typeface="Calibri" pitchFamily="34" charset="0"/>
+                <a:latin typeface="Amiri" pitchFamily="2" charset="-78"/>
                 <a:ea typeface="Amiri" pitchFamily="2" charset="-78"/>
                 <a:cs typeface="Amiri" pitchFamily="2" charset="-78"/>
               </a:rPr>
@@ -3914,7 +3914,7 @@
                 <a:solidFill>
                   <a:srgbClr val="FFFFFF"/>
                 </a:solidFill>
-                <a:latin typeface="Calibri" pitchFamily="34" charset="0"/>
+                <a:latin typeface="Amiri" pitchFamily="2" charset="-78"/>
                 <a:ea typeface="Amiri" pitchFamily="2" charset="-78"/>
                 <a:cs typeface="Amiri" pitchFamily="2" charset="-78"/>
               </a:rPr>
@@ -3980,7 +3980,7 @@
                 <a:solidFill>
                   <a:srgbClr val="FFFFFF"/>
                 </a:solidFill>
-                <a:latin typeface="Calibri" pitchFamily="34" charset="0"/>
+                <a:latin typeface="Amiri" pitchFamily="2" charset="-78"/>
                 <a:ea typeface="Amiri" pitchFamily="2" charset="-78"/>
                 <a:cs typeface="Amiri" pitchFamily="2" charset="-78"/>
               </a:rPr>
@@ -4046,7 +4046,7 @@
                 <a:solidFill>
                   <a:srgbClr val="FFFFFF"/>
                 </a:solidFill>
-                <a:latin typeface="Calibri" pitchFamily="34" charset="0"/>
+                <a:latin typeface="Amiri" pitchFamily="2" charset="-78"/>
                 <a:ea typeface="Amiri" pitchFamily="2" charset="-78"/>
                 <a:cs typeface="Amiri" pitchFamily="2" charset="-78"/>
               </a:rPr>
@@ -4844,7 +4844,7 @@
                 <a:solidFill>
                   <a:srgbClr val="FFFFFF"/>
                 </a:solidFill>
-                <a:latin typeface="Calibri" pitchFamily="34" charset="0"/>
+                <a:latin typeface="Amiri" pitchFamily="2" charset="-78"/>
                 <a:ea typeface="Amiri" pitchFamily="2" charset="-78"/>
                 <a:cs typeface="Amiri" pitchFamily="2" charset="-78"/>
               </a:rPr>
@@ -4910,7 +4910,7 @@
                 <a:solidFill>
                   <a:srgbClr val="FFFFFF"/>
                 </a:solidFill>
-                <a:latin typeface="Calibri" pitchFamily="34" charset="0"/>
+                <a:latin typeface="Amiri" pitchFamily="2" charset="-78"/>
                 <a:ea typeface="Amiri" pitchFamily="2" charset="-78"/>
                 <a:cs typeface="Amiri" pitchFamily="2" charset="-78"/>
               </a:rPr>
@@ -4976,7 +4976,7 @@
                 <a:solidFill>
                   <a:srgbClr val="FFFFFF"/>
                 </a:solidFill>
-                <a:latin typeface="Calibri" pitchFamily="34" charset="0"/>
+                <a:latin typeface="Amiri" pitchFamily="2" charset="-78"/>
                 <a:ea typeface="Amiri" pitchFamily="2" charset="-78"/>
                 <a:cs typeface="Amiri" pitchFamily="2" charset="-78"/>
               </a:rPr>
@@ -5042,7 +5042,7 @@
                 <a:solidFill>
                   <a:srgbClr val="FFFFFF"/>
                 </a:solidFill>
-                <a:latin typeface="Calibri" pitchFamily="34" charset="0"/>
+                <a:latin typeface="Amiri" pitchFamily="2" charset="-78"/>
                 <a:ea typeface="Amiri" pitchFamily="2" charset="-78"/>
                 <a:cs typeface="Amiri" pitchFamily="2" charset="-78"/>
               </a:rPr>
@@ -8602,7 +8602,7 @@
                 <a:solidFill>
                   <a:srgbClr val="FFFFFF"/>
                 </a:solidFill>
-                <a:latin typeface="Calibri" pitchFamily="34" charset="0"/>
+                <a:latin typeface="Amiri" pitchFamily="2" charset="-78"/>
                 <a:ea typeface="Amiri" pitchFamily="2" charset="-78"/>
                 <a:cs typeface="Amiri" pitchFamily="2" charset="-78"/>
               </a:rPr>
@@ -8668,7 +8668,7 @@
                 <a:solidFill>
                   <a:srgbClr val="FFFFFF"/>
                 </a:solidFill>
-                <a:latin typeface="Calibri" pitchFamily="34" charset="0"/>
+                <a:latin typeface="Amiri" pitchFamily="2" charset="-78"/>
                 <a:ea typeface="Amiri" pitchFamily="2" charset="-78"/>
                 <a:cs typeface="Amiri" pitchFamily="2" charset="-78"/>
               </a:rPr>
@@ -8734,7 +8734,7 @@
                 <a:solidFill>
                   <a:srgbClr val="FFFFFF"/>
                 </a:solidFill>
-                <a:latin typeface="Calibri" pitchFamily="34" charset="0"/>
+                <a:latin typeface="Amiri" pitchFamily="2" charset="-78"/>
                 <a:ea typeface="Amiri" pitchFamily="2" charset="-78"/>
                 <a:cs typeface="Amiri" pitchFamily="2" charset="-78"/>
               </a:rPr>
@@ -8800,7 +8800,7 @@
                 <a:solidFill>
                   <a:srgbClr val="FFFFFF"/>
                 </a:solidFill>
-                <a:latin typeface="Calibri" pitchFamily="34" charset="0"/>
+                <a:latin typeface="Amiri" pitchFamily="2" charset="-78"/>
                 <a:ea typeface="Amiri" pitchFamily="2" charset="-78"/>
                 <a:cs typeface="Amiri" pitchFamily="2" charset="-78"/>
               </a:rPr>
@@ -9587,7 +9587,7 @@
                 <a:solidFill>
                   <a:srgbClr val="FFFFFF"/>
                 </a:solidFill>
-                <a:latin typeface="Calibri" pitchFamily="34" charset="0"/>
+                <a:latin typeface="Amiri" pitchFamily="2" charset="-78"/>
                 <a:ea typeface="Amiri" pitchFamily="2" charset="-78"/>
                 <a:cs typeface="Amiri" pitchFamily="2" charset="-78"/>
               </a:rPr>
@@ -9653,7 +9653,7 @@
                 <a:solidFill>
                   <a:srgbClr val="FFFFFF"/>
                 </a:solidFill>
-                <a:latin typeface="Calibri" pitchFamily="34" charset="0"/>
+                <a:latin typeface="Amiri" pitchFamily="2" charset="-78"/>
                 <a:ea typeface="Amiri" pitchFamily="2" charset="-78"/>
                 <a:cs typeface="Amiri" pitchFamily="2" charset="-78"/>
               </a:rPr>
@@ -9719,7 +9719,7 @@
                 <a:solidFill>
                   <a:srgbClr val="FFFFFF"/>
                 </a:solidFill>
-                <a:latin typeface="Calibri" pitchFamily="34" charset="0"/>
+                <a:latin typeface="Amiri" pitchFamily="2" charset="-78"/>
                 <a:ea typeface="Amiri" pitchFamily="2" charset="-78"/>
                 <a:cs typeface="Amiri" pitchFamily="2" charset="-78"/>
               </a:rPr>
@@ -9785,7 +9785,7 @@
                 <a:solidFill>
                   <a:srgbClr val="FFFFFF"/>
                 </a:solidFill>
-                <a:latin typeface="Calibri" pitchFamily="34" charset="0"/>
+                <a:latin typeface="Amiri" pitchFamily="2" charset="-78"/>
                 <a:ea typeface="Amiri" pitchFamily="2" charset="-78"/>
                 <a:cs typeface="Amiri" pitchFamily="2" charset="-78"/>
               </a:rPr>
@@ -10572,7 +10572,7 @@
                 <a:solidFill>
                   <a:srgbClr val="FFFFFF"/>
                 </a:solidFill>
-                <a:latin typeface="Calibri" pitchFamily="34" charset="0"/>
+                <a:latin typeface="Amiri" pitchFamily="2" charset="-78"/>
                 <a:ea typeface="Amiri" pitchFamily="2" charset="-78"/>
                 <a:cs typeface="Amiri" pitchFamily="2" charset="-78"/>
               </a:rPr>
@@ -10638,7 +10638,7 @@
                 <a:solidFill>
                   <a:srgbClr val="FFFFFF"/>
                 </a:solidFill>
-                <a:latin typeface="Calibri" pitchFamily="34" charset="0"/>
+                <a:latin typeface="Amiri" pitchFamily="2" charset="-78"/>
                 <a:ea typeface="Amiri" pitchFamily="2" charset="-78"/>
                 <a:cs typeface="Amiri" pitchFamily="2" charset="-78"/>
               </a:rPr>
@@ -10704,7 +10704,7 @@
                 <a:solidFill>
                   <a:srgbClr val="FFFFFF"/>
                 </a:solidFill>
-                <a:latin typeface="Calibri" pitchFamily="34" charset="0"/>
+                <a:latin typeface="Amiri" pitchFamily="2" charset="-78"/>
                 <a:ea typeface="Amiri" pitchFamily="2" charset="-78"/>
                 <a:cs typeface="Amiri" pitchFamily="2" charset="-78"/>
               </a:rPr>
@@ -10770,7 +10770,7 @@
                 <a:solidFill>
                   <a:srgbClr val="FFFFFF"/>
                 </a:solidFill>
-                <a:latin typeface="Calibri" pitchFamily="34" charset="0"/>
+                <a:latin typeface="Amiri" pitchFamily="2" charset="-78"/>
                 <a:ea typeface="Amiri" pitchFamily="2" charset="-78"/>
                 <a:cs typeface="Amiri" pitchFamily="2" charset="-78"/>
               </a:rPr>
